--- a/automation/ecoco_客服週報_第34週_0817~0823.pptx
+++ b/automation/ecoco_客服週報_第34週_0817~0823.pptx
@@ -1250,7 +1250,7 @@
       </p:sp>
       <p:pic>
         <p:nvPicPr>
-          <p:cNvPr id="8" name="Image 0" descr="/home/claude/work/icons/headset_blue.png">    </p:cNvPr>
+          <p:cNvPr id="8" name="Image 0" descr="D:\info\0507_Weekly-Report\Operations-Weekly-Report\automation\icons\headset_blue.png">    </p:cNvPr>
           <p:cNvPicPr>
             <a:picLocks noChangeAspect="1"/>
           </p:cNvPicPr>
@@ -1525,7 +1525,7 @@
       </p:sp>
       <p:pic>
         <p:nvPicPr>
-          <p:cNvPr id="16" name="Image 1" descr="/home/claude/work/icons/warn_orange.png">    </p:cNvPr>
+          <p:cNvPr id="16" name="Image 1" descr="D:\info\0507_Weekly-Report\Operations-Weekly-Report\automation\icons\warn_orange.png">    </p:cNvPr>
           <p:cNvPicPr>
             <a:picLocks noChangeAspect="1"/>
           </p:cNvPicPr>
@@ -1786,7 +1786,7 @@
       </p:sp>
       <p:pic>
         <p:nvPicPr>
-          <p:cNvPr id="24" name="Image 2" descr="/home/claude/work/icons/pin_darkblue.png">    </p:cNvPr>
+          <p:cNvPr id="24" name="Image 2" descr="D:\info\0507_Weekly-Report\Operations-Weekly-Report\automation\icons\pin_darkblue.png">    </p:cNvPr>
           <p:cNvPicPr>
             <a:picLocks noChangeAspect="1"/>
           </p:cNvPicPr>
@@ -2047,7 +2047,7 @@
       </p:sp>
       <p:pic>
         <p:nvPicPr>
-          <p:cNvPr id="32" name="Image 3" descr="/home/claude/work/icons/usercog_gold.png">    </p:cNvPr>
+          <p:cNvPr id="32" name="Image 3" descr="D:\info\0507_Weekly-Report\Operations-Weekly-Report\automation\icons\usercog_gold.png">    </p:cNvPr>
           <p:cNvPicPr>
             <a:picLocks noChangeAspect="1"/>
           </p:cNvPicPr>
@@ -5741,7 +5741,7 @@
                 <a:ea typeface="Noto Sans TC Bold" pitchFamily="34" charset="-122"/>
                 <a:cs typeface="Noto Sans TC Bold" pitchFamily="34" charset="-120"/>
               </a:rPr>
-              <a:t>點數未入帳號</a:t>
+              <a:t>許願新增站點/設站建議</a:t>
             </a:r>
             <a:endParaRPr lang="en-US" sz="1250" dirty="0"/>
           </a:p>
@@ -5959,7 +5959,7 @@
                 <a:ea typeface="Noto Sans TC Bold" pitchFamily="34" charset="-122"/>
                 <a:cs typeface="Noto Sans TC Bold" pitchFamily="34" charset="-120"/>
               </a:rPr>
-              <a:t>許願新增站點/設站建議</a:t>
+              <a:t>點數未入帳號</a:t>
             </a:r>
             <a:endParaRPr lang="en-US" sz="1250" dirty="0"/>
           </a:p>
@@ -6246,7 +6246,7 @@
       </p:sp>
       <p:pic>
         <p:nvPicPr>
-          <p:cNvPr id="7" name="Image 0" descr="/home/claude/work/icons/recycle_blue.png">    </p:cNvPr>
+          <p:cNvPr id="7" name="Image 0" descr="D:\info\0507_Weekly-Report\Operations-Weekly-Report\automation\icons\recycle_blue.png">    </p:cNvPr>
           <p:cNvPicPr>
             <a:picLocks noChangeAspect="1"/>
           </p:cNvPicPr>
@@ -6484,7 +6484,7 @@
       </p:sp>
       <p:pic>
         <p:nvPicPr>
-          <p:cNvPr id="14" name="Image 1" descr="/home/claude/work/icons/pin_gray.png">    </p:cNvPr>
+          <p:cNvPr id="14" name="Image 1" descr="D:\info\0507_Weekly-Report\Operations-Weekly-Report\automation\icons\pin_gray.png">    </p:cNvPr>
           <p:cNvPicPr>
             <a:picLocks noChangeAspect="1"/>
           </p:cNvPicPr>
@@ -6661,7 +6661,7 @@
       </p:sp>
       <p:pic>
         <p:nvPicPr>
-          <p:cNvPr id="19" name="Image 2" descr="/home/claude/work/icons/pin_gray.png">    </p:cNvPr>
+          <p:cNvPr id="19" name="Image 2" descr="D:\info\0507_Weekly-Report\Operations-Weekly-Report\automation\icons\pin_gray.png">    </p:cNvPr>
           <p:cNvPicPr>
             <a:picLocks noChangeAspect="1"/>
           </p:cNvPicPr>
@@ -6838,7 +6838,7 @@
       </p:sp>
       <p:pic>
         <p:nvPicPr>
-          <p:cNvPr id="24" name="Image 3" descr="/home/claude/work/icons/pin_gray.png">    </p:cNvPr>
+          <p:cNvPr id="24" name="Image 3" descr="D:\info\0507_Weekly-Report\Operations-Weekly-Report\automation\icons\pin_gray.png">    </p:cNvPr>
           <p:cNvPicPr>
             <a:picLocks noChangeAspect="1"/>
           </p:cNvPicPr>
@@ -6935,7 +6935,7 @@
       </p:sp>
       <p:pic>
         <p:nvPicPr>
-          <p:cNvPr id="27" name="Image 4" descr="/home/claude/work/icons/battery_orange.png">    </p:cNvPr>
+          <p:cNvPr id="27" name="Image 4" descr="D:\info\0507_Weekly-Report\Operations-Weekly-Report\automation\icons\battery_orange.png">    </p:cNvPr>
           <p:cNvPicPr>
             <a:picLocks noChangeAspect="1"/>
           </p:cNvPicPr>
@@ -7173,7 +7173,7 @@
       </p:sp>
       <p:pic>
         <p:nvPicPr>
-          <p:cNvPr id="34" name="Image 5" descr="/home/claude/work/icons/pin_gray.png">    </p:cNvPr>
+          <p:cNvPr id="34" name="Image 5" descr="D:\info\0507_Weekly-Report\Operations-Weekly-Report\automation\icons\pin_gray.png">    </p:cNvPr>
           <p:cNvPicPr>
             <a:picLocks noChangeAspect="1"/>
           </p:cNvPicPr>
@@ -7350,7 +7350,7 @@
       </p:sp>
       <p:pic>
         <p:nvPicPr>
-          <p:cNvPr id="39" name="Image 6" descr="/home/claude/work/icons/pin_gray.png">    </p:cNvPr>
+          <p:cNvPr id="39" name="Image 6" descr="D:\info\0507_Weekly-Report\Operations-Weekly-Report\automation\icons\pin_gray.png">    </p:cNvPr>
           <p:cNvPicPr>
             <a:picLocks noChangeAspect="1"/>
           </p:cNvPicPr>
@@ -7527,7 +7527,7 @@
       </p:sp>
       <p:pic>
         <p:nvPicPr>
-          <p:cNvPr id="44" name="Image 7" descr="/home/claude/work/icons/pin_gray.png">    </p:cNvPr>
+          <p:cNvPr id="44" name="Image 7" descr="D:\info\0507_Weekly-Report\Operations-Weekly-Report\automation\icons\pin_gray.png">    </p:cNvPr>
           <p:cNvPicPr>
             <a:picLocks noChangeAspect="1"/>
           </p:cNvPicPr>
@@ -7617,7 +7617,7 @@
       </p:sp>
       <p:pic>
         <p:nvPicPr>
-          <p:cNvPr id="47" name="Image 8" descr="/home/claude/work/icons/warn.png">    </p:cNvPr>
+          <p:cNvPr id="47" name="Image 8" descr="D:\info\0507_Weekly-Report\Operations-Weekly-Report\automation\icons\warn.png">    </p:cNvPr>
           <p:cNvPicPr>
             <a:picLocks noChangeAspect="1"/>
           </p:cNvPicPr>
@@ -7805,7 +7805,7 @@
                 <a:ea typeface="Noto Sans TC Bold" pitchFamily="34" charset="-122"/>
                 <a:cs typeface="Noto Sans TC Bold" pitchFamily="34" charset="-120"/>
               </a:rPr>
-              <a:t>資料更新日期：2026/08/26（區間2026/07/27-08/26）</a:t>
+              <a:t>資料更新日期：2026/08/27（區間2026/07/28-08/27）</a:t>
             </a:r>
             <a:endParaRPr lang="en-US" sz="1100" dirty="0"/>
           </a:p>
@@ -13671,7 +13671,7 @@
       </p:sp>
       <p:pic>
         <p:nvPicPr>
-          <p:cNvPr id="9" name="Image 0" descr="/home/claude/work/icons/key_blue.png">    </p:cNvPr>
+          <p:cNvPr id="9" name="Image 0" descr="D:\info\0507_Weekly-Report\Operations-Weekly-Report\automation\icons\key_blue.png">    </p:cNvPr>
           <p:cNvPicPr>
             <a:picLocks noChangeAspect="1"/>
           </p:cNvPicPr>
@@ -13897,7 +13897,7 @@
       </p:sp>
       <p:pic>
         <p:nvPicPr>
-          <p:cNvPr id="16" name="Image 1" descr="/home/claude/work/icons/key_blue.png">    </p:cNvPr>
+          <p:cNvPr id="16" name="Image 1" descr="D:\info\0507_Weekly-Report\Operations-Weekly-Report\automation\icons\key_blue.png">    </p:cNvPr>
           <p:cNvPicPr>
             <a:picLocks noChangeAspect="1"/>
           </p:cNvPicPr>
@@ -14259,7 +14259,7 @@
       </p:sp>
       <p:pic>
         <p:nvPicPr>
-          <p:cNvPr id="27" name="Image 2" descr="/home/claude/work/icons/key_blue.png">    </p:cNvPr>
+          <p:cNvPr id="27" name="Image 2" descr="D:\info\0507_Weekly-Report\Operations-Weekly-Report\automation\icons\key_blue.png">    </p:cNvPr>
           <p:cNvPicPr>
             <a:picLocks noChangeAspect="1"/>
           </p:cNvPicPr>

--- a/automation/ecoco_客服週報_第34週_0817~0823.pptx
+++ b/automation/ecoco_客服週報_第34週_0817~0823.pptx
@@ -14559,8 +14559,8 @@
         </p:nvSpPr>
         <p:spPr>
           <a:xfrm>
-            <a:off x="594360" y="5367528"/>
-            <a:ext cx="10972800" cy="256032"/>
+            <a:off x="594360" y="5349240"/>
+            <a:ext cx="10972800" cy="237744"/>
           </a:xfrm>
           <a:prstGeom prst="rect">
             <a:avLst/>
@@ -14592,14 +14592,53 @@
       </p:sp>
       <p:sp>
         <p:nvSpPr>
-          <p:cNvPr id="37" name="Shape 31"/>
+          <p:cNvPr id="37" name="Text 31"/>
           <p:cNvSpPr/>
           <p:nvPr/>
         </p:nvSpPr>
         <p:spPr>
           <a:xfrm>
-            <a:off x="594360" y="5678424"/>
-            <a:ext cx="292608" cy="219456"/>
+            <a:off x="594360" y="5596128"/>
+            <a:ext cx="2743200" cy="201168"/>
+          </a:xfrm>
+          <a:prstGeom prst="rect">
+            <a:avLst/>
+          </a:prstGeom>
+          <a:noFill/>
+          <a:ln/>
+        </p:spPr>
+        <p:txBody>
+          <a:bodyPr wrap="square" lIns="0" tIns="0" rIns="0" bIns="0" rtlCol="0" anchor="ctr"/>
+          <a:lstStyle/>
+          <a:p>
+            <a:pPr indent="0" marL="0">
+              <a:buNone/>
+            </a:pPr>
+            <a:r>
+              <a:rPr lang="en-US" sz="900" b="1" dirty="0">
+                <a:solidFill>
+                  <a:srgbClr val="060E9F"/>
+                </a:solidFill>
+                <a:latin typeface="Noto Sans TC Bold" pitchFamily="34" charset="0"/>
+                <a:ea typeface="Noto Sans TC Bold" pitchFamily="34" charset="-122"/>
+                <a:cs typeface="Noto Sans TC Bold" pitchFamily="34" charset="-120"/>
+              </a:rPr>
+              <a:t>等級+加分/瓶量：</a:t>
+            </a:r>
+            <a:endParaRPr lang="en-US" sz="900" dirty="0"/>
+          </a:p>
+        </p:txBody>
+      </p:sp>
+      <p:sp>
+        <p:nvSpPr>
+          <p:cNvPr id="38" name="Shape 32"/>
+          <p:cNvSpPr/>
+          <p:nvPr/>
+        </p:nvSpPr>
+        <p:spPr>
+          <a:xfrm>
+            <a:off x="594360" y="5824728"/>
+            <a:ext cx="502920" cy="219456"/>
           </a:xfrm>
           <a:prstGeom prst="roundRect">
             <a:avLst>
@@ -14621,14 +14660,14 @@
       </p:sp>
       <p:sp>
         <p:nvSpPr>
-          <p:cNvPr id="38" name="Text 32"/>
+          <p:cNvPr id="39" name="Text 33"/>
           <p:cNvSpPr/>
           <p:nvPr/>
         </p:nvSpPr>
         <p:spPr>
           <a:xfrm>
-            <a:off x="594360" y="5678424"/>
-            <a:ext cx="292608" cy="219456"/>
+            <a:off x="594360" y="5824728"/>
+            <a:ext cx="502920" cy="219456"/>
           </a:xfrm>
           <a:prstGeom prst="rect">
             <a:avLst/>
@@ -14644,7 +14683,7 @@
               <a:buNone/>
             </a:pPr>
             <a:r>
-              <a:rPr lang="en-US" sz="900" b="1" dirty="0">
+              <a:rPr lang="en-US" sz="850" b="1" dirty="0">
                 <a:solidFill>
                   <a:srgbClr val="FF5000"/>
                 </a:solidFill>
@@ -14652,22 +14691,22 @@
                 <a:ea typeface="Noto Sans TC Bold" pitchFamily="34" charset="-122"/>
                 <a:cs typeface="Noto Sans TC Bold" pitchFamily="34" charset="-120"/>
               </a:rPr>
-              <a:t>S</a:t>
+              <a:t>S+18</a:t>
             </a:r>
-            <a:endParaRPr lang="en-US" sz="900" dirty="0"/>
+            <a:endParaRPr lang="en-US" sz="850" dirty="0"/>
           </a:p>
         </p:txBody>
       </p:sp>
       <p:sp>
         <p:nvSpPr>
-          <p:cNvPr id="39" name="Text 33"/>
+          <p:cNvPr id="40" name="Text 34"/>
           <p:cNvSpPr/>
           <p:nvPr/>
         </p:nvSpPr>
         <p:spPr>
           <a:xfrm>
-            <a:off x="932688" y="5678424"/>
-            <a:ext cx="1201783" cy="219456"/>
+            <a:off x="1133856" y="5824728"/>
+            <a:ext cx="813816" cy="219456"/>
           </a:xfrm>
           <a:prstGeom prst="rect">
             <a:avLst/>
@@ -14683,7 +14722,7 @@
               <a:buNone/>
             </a:pPr>
             <a:r>
-              <a:rPr lang="en-US" sz="750" dirty="0">
+              <a:rPr lang="en-US" sz="700" dirty="0">
                 <a:solidFill>
                   <a:srgbClr val="888888"/>
                 </a:solidFill>
@@ -14693,20 +14732,20 @@
               </a:rPr>
               <a:t>17,000瓶以上</a:t>
             </a:r>
-            <a:endParaRPr lang="en-US" sz="750" dirty="0"/>
+            <a:endParaRPr lang="en-US" sz="700" dirty="0"/>
           </a:p>
         </p:txBody>
       </p:sp>
       <p:sp>
         <p:nvSpPr>
-          <p:cNvPr id="40" name="Shape 34"/>
+          <p:cNvPr id="41" name="Shape 35"/>
           <p:cNvSpPr/>
           <p:nvPr/>
         </p:nvSpPr>
         <p:spPr>
           <a:xfrm>
-            <a:off x="2161903" y="5678424"/>
-            <a:ext cx="292608" cy="219456"/>
+            <a:off x="1965960" y="5824728"/>
+            <a:ext cx="502920" cy="219456"/>
           </a:xfrm>
           <a:prstGeom prst="roundRect">
             <a:avLst>
@@ -14728,14 +14767,14 @@
       </p:sp>
       <p:sp>
         <p:nvSpPr>
-          <p:cNvPr id="41" name="Text 35"/>
+          <p:cNvPr id="42" name="Text 36"/>
           <p:cNvSpPr/>
           <p:nvPr/>
         </p:nvSpPr>
         <p:spPr>
           <a:xfrm>
-            <a:off x="2161903" y="5678424"/>
-            <a:ext cx="292608" cy="219456"/>
+            <a:off x="1965960" y="5824728"/>
+            <a:ext cx="502920" cy="219456"/>
           </a:xfrm>
           <a:prstGeom prst="rect">
             <a:avLst/>
@@ -14751,7 +14790,7 @@
               <a:buNone/>
             </a:pPr>
             <a:r>
-              <a:rPr lang="en-US" sz="900" b="1" dirty="0">
+              <a:rPr lang="en-US" sz="850" b="1" dirty="0">
                 <a:solidFill>
                   <a:srgbClr val="0076A9"/>
                 </a:solidFill>
@@ -14759,22 +14798,22 @@
                 <a:ea typeface="Noto Sans TC Bold" pitchFamily="34" charset="-122"/>
                 <a:cs typeface="Noto Sans TC Bold" pitchFamily="34" charset="-120"/>
               </a:rPr>
-              <a:t>A</a:t>
+              <a:t>A+12</a:t>
             </a:r>
-            <a:endParaRPr lang="en-US" sz="900" dirty="0"/>
+            <a:endParaRPr lang="en-US" sz="850" dirty="0"/>
           </a:p>
         </p:txBody>
       </p:sp>
       <p:sp>
         <p:nvSpPr>
-          <p:cNvPr id="42" name="Text 36"/>
+          <p:cNvPr id="43" name="Text 37"/>
           <p:cNvSpPr/>
           <p:nvPr/>
         </p:nvSpPr>
         <p:spPr>
           <a:xfrm>
-            <a:off x="2500231" y="5678424"/>
-            <a:ext cx="1201783" cy="219456"/>
+            <a:off x="2505456" y="5824728"/>
+            <a:ext cx="813816" cy="219456"/>
           </a:xfrm>
           <a:prstGeom prst="rect">
             <a:avLst/>
@@ -14790,7 +14829,7 @@
               <a:buNone/>
             </a:pPr>
             <a:r>
-              <a:rPr lang="en-US" sz="750" dirty="0">
+              <a:rPr lang="en-US" sz="700" dirty="0">
                 <a:solidFill>
                   <a:srgbClr val="888888"/>
                 </a:solidFill>
@@ -14800,20 +14839,20 @@
               </a:rPr>
               <a:t>13,300～16,999瓶</a:t>
             </a:r>
-            <a:endParaRPr lang="en-US" sz="750" dirty="0"/>
+            <a:endParaRPr lang="en-US" sz="700" dirty="0"/>
           </a:p>
         </p:txBody>
       </p:sp>
       <p:sp>
         <p:nvSpPr>
-          <p:cNvPr id="43" name="Shape 37"/>
+          <p:cNvPr id="44" name="Shape 38"/>
           <p:cNvSpPr/>
           <p:nvPr/>
         </p:nvSpPr>
         <p:spPr>
           <a:xfrm>
-            <a:off x="3729446" y="5678424"/>
-            <a:ext cx="292608" cy="219456"/>
+            <a:off x="3337560" y="5824728"/>
+            <a:ext cx="502920" cy="219456"/>
           </a:xfrm>
           <a:prstGeom prst="roundRect">
             <a:avLst>
@@ -14835,14 +14874,14 @@
       </p:sp>
       <p:sp>
         <p:nvSpPr>
-          <p:cNvPr id="44" name="Text 38"/>
+          <p:cNvPr id="45" name="Text 39"/>
           <p:cNvSpPr/>
           <p:nvPr/>
         </p:nvSpPr>
         <p:spPr>
           <a:xfrm>
-            <a:off x="3729446" y="5678424"/>
-            <a:ext cx="292608" cy="219456"/>
+            <a:off x="3337560" y="5824728"/>
+            <a:ext cx="502920" cy="219456"/>
           </a:xfrm>
           <a:prstGeom prst="rect">
             <a:avLst/>
@@ -14858,7 +14897,7 @@
               <a:buNone/>
             </a:pPr>
             <a:r>
-              <a:rPr lang="en-US" sz="900" b="1" dirty="0">
+              <a:rPr lang="en-US" sz="850" b="1" dirty="0">
                 <a:solidFill>
                   <a:srgbClr val="060E9F"/>
                 </a:solidFill>
@@ -14866,22 +14905,22 @@
                 <a:ea typeface="Noto Sans TC Bold" pitchFamily="34" charset="-122"/>
                 <a:cs typeface="Noto Sans TC Bold" pitchFamily="34" charset="-120"/>
               </a:rPr>
-              <a:t>B</a:t>
+              <a:t>B+8</a:t>
             </a:r>
-            <a:endParaRPr lang="en-US" sz="900" dirty="0"/>
+            <a:endParaRPr lang="en-US" sz="850" dirty="0"/>
           </a:p>
         </p:txBody>
       </p:sp>
       <p:sp>
         <p:nvSpPr>
-          <p:cNvPr id="45" name="Text 39"/>
+          <p:cNvPr id="46" name="Text 40"/>
           <p:cNvSpPr/>
           <p:nvPr/>
         </p:nvSpPr>
         <p:spPr>
           <a:xfrm>
-            <a:off x="4067774" y="5678424"/>
-            <a:ext cx="1201783" cy="219456"/>
+            <a:off x="3877056" y="5824728"/>
+            <a:ext cx="813816" cy="219456"/>
           </a:xfrm>
           <a:prstGeom prst="rect">
             <a:avLst/>
@@ -14897,7 +14936,7 @@
               <a:buNone/>
             </a:pPr>
             <a:r>
-              <a:rPr lang="en-US" sz="750" dirty="0">
+              <a:rPr lang="en-US" sz="700" dirty="0">
                 <a:solidFill>
                   <a:srgbClr val="888888"/>
                 </a:solidFill>
@@ -14907,20 +14946,20 @@
               </a:rPr>
               <a:t>11,100～13,299瓶</a:t>
             </a:r>
-            <a:endParaRPr lang="en-US" sz="750" dirty="0"/>
+            <a:endParaRPr lang="en-US" sz="700" dirty="0"/>
           </a:p>
         </p:txBody>
       </p:sp>
       <p:sp>
         <p:nvSpPr>
-          <p:cNvPr id="46" name="Shape 40"/>
+          <p:cNvPr id="47" name="Shape 41"/>
           <p:cNvSpPr/>
           <p:nvPr/>
         </p:nvSpPr>
         <p:spPr>
           <a:xfrm>
-            <a:off x="5296989" y="5678424"/>
-            <a:ext cx="292608" cy="219456"/>
+            <a:off x="4709160" y="5824728"/>
+            <a:ext cx="502920" cy="219456"/>
           </a:xfrm>
           <a:prstGeom prst="roundRect">
             <a:avLst>
@@ -14942,14 +14981,14 @@
       </p:sp>
       <p:sp>
         <p:nvSpPr>
-          <p:cNvPr id="47" name="Text 41"/>
+          <p:cNvPr id="48" name="Text 42"/>
           <p:cNvSpPr/>
           <p:nvPr/>
         </p:nvSpPr>
         <p:spPr>
           <a:xfrm>
-            <a:off x="5296989" y="5678424"/>
-            <a:ext cx="292608" cy="219456"/>
+            <a:off x="4709160" y="5824728"/>
+            <a:ext cx="502920" cy="219456"/>
           </a:xfrm>
           <a:prstGeom prst="rect">
             <a:avLst/>
@@ -14965,7 +15004,7 @@
               <a:buNone/>
             </a:pPr>
             <a:r>
-              <a:rPr lang="en-US" sz="900" b="1" dirty="0">
+              <a:rPr lang="en-US" sz="850" b="1" dirty="0">
                 <a:solidFill>
                   <a:srgbClr val="4F86A0"/>
                 </a:solidFill>
@@ -14973,22 +15012,22 @@
                 <a:ea typeface="Noto Sans TC Bold" pitchFamily="34" charset="-122"/>
                 <a:cs typeface="Noto Sans TC Bold" pitchFamily="34" charset="-120"/>
               </a:rPr>
-              <a:t>C</a:t>
+              <a:t>C+4</a:t>
             </a:r>
-            <a:endParaRPr lang="en-US" sz="900" dirty="0"/>
+            <a:endParaRPr lang="en-US" sz="850" dirty="0"/>
           </a:p>
         </p:txBody>
       </p:sp>
       <p:sp>
         <p:nvSpPr>
-          <p:cNvPr id="48" name="Text 42"/>
+          <p:cNvPr id="49" name="Text 43"/>
           <p:cNvSpPr/>
           <p:nvPr/>
         </p:nvSpPr>
         <p:spPr>
           <a:xfrm>
-            <a:off x="5635317" y="5678424"/>
-            <a:ext cx="1201783" cy="219456"/>
+            <a:off x="5248656" y="5824728"/>
+            <a:ext cx="813816" cy="219456"/>
           </a:xfrm>
           <a:prstGeom prst="rect">
             <a:avLst/>
@@ -15004,7 +15043,7 @@
               <a:buNone/>
             </a:pPr>
             <a:r>
-              <a:rPr lang="en-US" sz="750" dirty="0">
+              <a:rPr lang="en-US" sz="700" dirty="0">
                 <a:solidFill>
                   <a:srgbClr val="888888"/>
                 </a:solidFill>
@@ -15014,20 +15053,20 @@
               </a:rPr>
               <a:t>9,000～11,099瓶</a:t>
             </a:r>
-            <a:endParaRPr lang="en-US" sz="750" dirty="0"/>
+            <a:endParaRPr lang="en-US" sz="700" dirty="0"/>
           </a:p>
         </p:txBody>
       </p:sp>
       <p:sp>
         <p:nvSpPr>
-          <p:cNvPr id="49" name="Shape 43"/>
+          <p:cNvPr id="50" name="Shape 44"/>
           <p:cNvSpPr/>
           <p:nvPr/>
         </p:nvSpPr>
         <p:spPr>
           <a:xfrm>
-            <a:off x="6864531" y="5678424"/>
-            <a:ext cx="292608" cy="219456"/>
+            <a:off x="6080760" y="5824728"/>
+            <a:ext cx="502920" cy="219456"/>
           </a:xfrm>
           <a:prstGeom prst="roundRect">
             <a:avLst>
@@ -15049,14 +15088,14 @@
       </p:sp>
       <p:sp>
         <p:nvSpPr>
-          <p:cNvPr id="50" name="Text 44"/>
+          <p:cNvPr id="51" name="Text 45"/>
           <p:cNvSpPr/>
           <p:nvPr/>
         </p:nvSpPr>
         <p:spPr>
           <a:xfrm>
-            <a:off x="6864531" y="5678424"/>
-            <a:ext cx="292608" cy="219456"/>
+            <a:off x="6080760" y="5824728"/>
+            <a:ext cx="502920" cy="219456"/>
           </a:xfrm>
           <a:prstGeom prst="rect">
             <a:avLst/>
@@ -15072,7 +15111,7 @@
               <a:buNone/>
             </a:pPr>
             <a:r>
-              <a:rPr lang="en-US" sz="900" b="1" dirty="0">
+              <a:rPr lang="en-US" sz="850" b="1" dirty="0">
                 <a:solidFill>
                   <a:srgbClr val="888888"/>
                 </a:solidFill>
@@ -15080,22 +15119,22 @@
                 <a:ea typeface="Noto Sans TC Bold" pitchFamily="34" charset="-122"/>
                 <a:cs typeface="Noto Sans TC Bold" pitchFamily="34" charset="-120"/>
               </a:rPr>
-              <a:t>D</a:t>
+              <a:t>D+2</a:t>
             </a:r>
-            <a:endParaRPr lang="en-US" sz="900" dirty="0"/>
+            <a:endParaRPr lang="en-US" sz="850" dirty="0"/>
           </a:p>
         </p:txBody>
       </p:sp>
       <p:sp>
         <p:nvSpPr>
-          <p:cNvPr id="51" name="Text 45"/>
+          <p:cNvPr id="52" name="Text 46"/>
           <p:cNvSpPr/>
           <p:nvPr/>
         </p:nvSpPr>
         <p:spPr>
           <a:xfrm>
-            <a:off x="7202859" y="5678424"/>
-            <a:ext cx="1201783" cy="219456"/>
+            <a:off x="6620256" y="5824728"/>
+            <a:ext cx="813816" cy="219456"/>
           </a:xfrm>
           <a:prstGeom prst="rect">
             <a:avLst/>
@@ -15111,7 +15150,7 @@
               <a:buNone/>
             </a:pPr>
             <a:r>
-              <a:rPr lang="en-US" sz="750" dirty="0">
+              <a:rPr lang="en-US" sz="700" dirty="0">
                 <a:solidFill>
                   <a:srgbClr val="888888"/>
                 </a:solidFill>
@@ -15121,20 +15160,20 @@
               </a:rPr>
               <a:t>6,900～8,999瓶</a:t>
             </a:r>
-            <a:endParaRPr lang="en-US" sz="750" dirty="0"/>
+            <a:endParaRPr lang="en-US" sz="700" dirty="0"/>
           </a:p>
         </p:txBody>
       </p:sp>
       <p:sp>
         <p:nvSpPr>
-          <p:cNvPr id="52" name="Shape 46"/>
+          <p:cNvPr id="53" name="Shape 47"/>
           <p:cNvSpPr/>
           <p:nvPr/>
         </p:nvSpPr>
         <p:spPr>
           <a:xfrm>
-            <a:off x="8432074" y="5678424"/>
-            <a:ext cx="292608" cy="219456"/>
+            <a:off x="7452360" y="5824728"/>
+            <a:ext cx="502920" cy="219456"/>
           </a:xfrm>
           <a:prstGeom prst="roundRect">
             <a:avLst>
@@ -15156,14 +15195,14 @@
       </p:sp>
       <p:sp>
         <p:nvSpPr>
-          <p:cNvPr id="53" name="Text 47"/>
+          <p:cNvPr id="54" name="Text 48"/>
           <p:cNvSpPr/>
           <p:nvPr/>
         </p:nvSpPr>
         <p:spPr>
           <a:xfrm>
-            <a:off x="8432074" y="5678424"/>
-            <a:ext cx="292608" cy="219456"/>
+            <a:off x="7452360" y="5824728"/>
+            <a:ext cx="502920" cy="219456"/>
           </a:xfrm>
           <a:prstGeom prst="rect">
             <a:avLst/>
@@ -15179,7 +15218,7 @@
               <a:buNone/>
             </a:pPr>
             <a:r>
-              <a:rPr lang="en-US" sz="900" b="1" dirty="0">
+              <a:rPr lang="en-US" sz="850" b="1" dirty="0">
                 <a:solidFill>
                   <a:srgbClr val="888888"/>
                 </a:solidFill>
@@ -15187,22 +15226,22 @@
                 <a:ea typeface="Noto Sans TC Bold" pitchFamily="34" charset="-122"/>
                 <a:cs typeface="Noto Sans TC Bold" pitchFamily="34" charset="-120"/>
               </a:rPr>
-              <a:t>E</a:t>
+              <a:t>E+1</a:t>
             </a:r>
-            <a:endParaRPr lang="en-US" sz="900" dirty="0"/>
+            <a:endParaRPr lang="en-US" sz="850" dirty="0"/>
           </a:p>
         </p:txBody>
       </p:sp>
       <p:sp>
         <p:nvSpPr>
-          <p:cNvPr id="54" name="Text 48"/>
+          <p:cNvPr id="55" name="Text 49"/>
           <p:cNvSpPr/>
           <p:nvPr/>
         </p:nvSpPr>
         <p:spPr>
           <a:xfrm>
-            <a:off x="8770402" y="5678424"/>
-            <a:ext cx="1201783" cy="219456"/>
+            <a:off x="7991856" y="5824728"/>
+            <a:ext cx="813816" cy="219456"/>
           </a:xfrm>
           <a:prstGeom prst="rect">
             <a:avLst/>
@@ -15218,7 +15257,7 @@
               <a:buNone/>
             </a:pPr>
             <a:r>
-              <a:rPr lang="en-US" sz="750" dirty="0">
+              <a:rPr lang="en-US" sz="700" dirty="0">
                 <a:solidFill>
                   <a:srgbClr val="888888"/>
                 </a:solidFill>
@@ -15228,20 +15267,20 @@
               </a:rPr>
               <a:t>4,100～6,899瓶</a:t>
             </a:r>
-            <a:endParaRPr lang="en-US" sz="750" dirty="0"/>
+            <a:endParaRPr lang="en-US" sz="700" dirty="0"/>
           </a:p>
         </p:txBody>
       </p:sp>
       <p:sp>
         <p:nvSpPr>
-          <p:cNvPr id="55" name="Shape 49"/>
+          <p:cNvPr id="56" name="Shape 50"/>
           <p:cNvSpPr/>
           <p:nvPr/>
         </p:nvSpPr>
         <p:spPr>
           <a:xfrm>
-            <a:off x="9999617" y="5678424"/>
-            <a:ext cx="292608" cy="219456"/>
+            <a:off x="8823960" y="5824728"/>
+            <a:ext cx="502920" cy="219456"/>
           </a:xfrm>
           <a:prstGeom prst="roundRect">
             <a:avLst>
@@ -15263,14 +15302,14 @@
       </p:sp>
       <p:sp>
         <p:nvSpPr>
-          <p:cNvPr id="56" name="Text 50"/>
+          <p:cNvPr id="57" name="Text 51"/>
           <p:cNvSpPr/>
           <p:nvPr/>
         </p:nvSpPr>
         <p:spPr>
           <a:xfrm>
-            <a:off x="9999617" y="5678424"/>
-            <a:ext cx="292608" cy="219456"/>
+            <a:off x="8823960" y="5824728"/>
+            <a:ext cx="502920" cy="219456"/>
           </a:xfrm>
           <a:prstGeom prst="rect">
             <a:avLst/>
@@ -15286,7 +15325,7 @@
               <a:buNone/>
             </a:pPr>
             <a:r>
-              <a:rPr lang="en-US" sz="900" b="1" dirty="0">
+              <a:rPr lang="en-US" sz="850" b="1" dirty="0">
                 <a:solidFill>
                   <a:srgbClr val="888888"/>
                 </a:solidFill>
@@ -15294,22 +15333,22 @@
                 <a:ea typeface="Noto Sans TC Bold" pitchFamily="34" charset="-122"/>
                 <a:cs typeface="Noto Sans TC Bold" pitchFamily="34" charset="-120"/>
               </a:rPr>
-              <a:t>F</a:t>
+              <a:t>F+0</a:t>
             </a:r>
-            <a:endParaRPr lang="en-US" sz="900" dirty="0"/>
+            <a:endParaRPr lang="en-US" sz="850" dirty="0"/>
           </a:p>
         </p:txBody>
       </p:sp>
       <p:sp>
         <p:nvSpPr>
-          <p:cNvPr id="57" name="Text 51"/>
+          <p:cNvPr id="58" name="Text 52"/>
           <p:cNvSpPr/>
           <p:nvPr/>
         </p:nvSpPr>
         <p:spPr>
           <a:xfrm>
-            <a:off x="10337945" y="5678424"/>
-            <a:ext cx="1201783" cy="219456"/>
+            <a:off x="9363456" y="5824728"/>
+            <a:ext cx="813816" cy="219456"/>
           </a:xfrm>
           <a:prstGeom prst="rect">
             <a:avLst/>
@@ -15325,7 +15364,7 @@
               <a:buNone/>
             </a:pPr>
             <a:r>
-              <a:rPr lang="en-US" sz="750" dirty="0">
+              <a:rPr lang="en-US" sz="700" dirty="0">
                 <a:solidFill>
                   <a:srgbClr val="888888"/>
                 </a:solidFill>
@@ -15335,20 +15374,88 @@
               </a:rPr>
               <a:t>4,100瓶以下</a:t>
             </a:r>
-            <a:endParaRPr lang="en-US" sz="750" dirty="0"/>
+            <a:endParaRPr lang="en-US" sz="700" dirty="0"/>
           </a:p>
         </p:txBody>
       </p:sp>
       <p:sp>
         <p:nvSpPr>
-          <p:cNvPr id="58" name="Text 52"/>
+          <p:cNvPr id="59" name="Shape 53"/>
           <p:cNvSpPr/>
           <p:nvPr/>
         </p:nvSpPr>
         <p:spPr>
           <a:xfrm>
-            <a:off x="594360" y="5971032"/>
-            <a:ext cx="10972800" cy="219456"/>
+            <a:off x="10195560" y="5824728"/>
+            <a:ext cx="502920" cy="219456"/>
+          </a:xfrm>
+          <a:prstGeom prst="roundRect">
+            <a:avLst>
+              <a:gd name="adj" fmla="val 50000"/>
+            </a:avLst>
+          </a:prstGeom>
+          <a:solidFill>
+            <a:srgbClr val="9C7A00">
+              <a:alpha val="15000"/>
+            </a:srgbClr>
+          </a:solidFill>
+          <a:ln w="9525">
+            <a:solidFill>
+              <a:srgbClr val="9C7A00"/>
+            </a:solidFill>
+            <a:prstDash val="solid"/>
+          </a:ln>
+        </p:spPr>
+      </p:sp>
+      <p:sp>
+        <p:nvSpPr>
+          <p:cNvPr id="60" name="Text 54"/>
+          <p:cNvSpPr/>
+          <p:nvPr/>
+        </p:nvSpPr>
+        <p:spPr>
+          <a:xfrm>
+            <a:off x="10195560" y="5824728"/>
+            <a:ext cx="502920" cy="219456"/>
+          </a:xfrm>
+          <a:prstGeom prst="rect">
+            <a:avLst/>
+          </a:prstGeom>
+          <a:noFill/>
+          <a:ln/>
+        </p:spPr>
+        <p:txBody>
+          <a:bodyPr wrap="square" lIns="0" tIns="0" rIns="0" bIns="0" rtlCol="0" anchor="ctr"/>
+          <a:lstStyle/>
+          <a:p>
+            <a:pPr algn="ctr" indent="0" marL="0">
+              <a:buNone/>
+            </a:pPr>
+            <a:r>
+              <a:rPr lang="en-US" sz="850" b="1" dirty="0">
+                <a:solidFill>
+                  <a:srgbClr val="9C7A00"/>
+                </a:solidFill>
+                <a:latin typeface="Noto Sans TC Bold" pitchFamily="34" charset="0"/>
+                <a:ea typeface="Noto Sans TC Bold" pitchFamily="34" charset="-122"/>
+                <a:cs typeface="Noto Sans TC Bold" pitchFamily="34" charset="-120"/>
+              </a:rPr>
+              <a:t>ARK+8</a:t>
+            </a:r>
+            <a:endParaRPr lang="en-US" sz="850" dirty="0"/>
+          </a:p>
+        </p:txBody>
+      </p:sp>
+      <p:sp>
+        <p:nvSpPr>
+          <p:cNvPr id="61" name="Text 55"/>
+          <p:cNvSpPr/>
+          <p:nvPr/>
+        </p:nvSpPr>
+        <p:spPr>
+          <a:xfrm>
+            <a:off x="10735056" y="5824728"/>
+            <a:ext cx="813816" cy="219456"/>
           </a:xfrm>
           <a:prstGeom prst="rect">
             <a:avLst/>
@@ -15364,7 +15471,7 @@
               <a:buNone/>
             </a:pPr>
             <a:r>
-              <a:rPr lang="en-US" sz="850" dirty="0">
+              <a:rPr lang="en-US" sz="700" dirty="0">
                 <a:solidFill>
                   <a:srgbClr val="888888"/>
                 </a:solidFill>
@@ -15372,9 +15479,9 @@
                 <a:ea typeface="Noto Sans TC Medium" pitchFamily="34" charset="-122"/>
                 <a:cs typeface="Noto Sans TC Medium" pitchFamily="34" charset="-120"/>
               </a:rPr>
-              <a:t>※ ARK/3台有效收瓶機/+8</a:t>
+              <a:t>3台有效收瓶機</a:t>
             </a:r>
-            <a:endParaRPr lang="en-US" sz="850" dirty="0"/>
+            <a:endParaRPr lang="en-US" sz="700" dirty="0"/>
           </a:p>
         </p:txBody>
       </p:sp>
